--- a/first-steps-power-apps.pptx
+++ b/first-steps-power-apps.pptx
@@ -5,7 +5,7 @@
     <p:sldMasterId id="2147483648" r:id="rId1"/>
   </p:sldMasterIdLst>
   <p:notesMasterIdLst>
-    <p:notesMasterId r:id="rId10"/>
+    <p:notesMasterId r:id="rId11"/>
   </p:notesMasterIdLst>
   <p:sldIdLst>
     <p:sldId id="256" r:id="rId2"/>
@@ -14,18 +14,19 @@
     <p:sldId id="407" r:id="rId5"/>
     <p:sldId id="428" r:id="rId6"/>
     <p:sldId id="434" r:id="rId7"/>
-    <p:sldId id="415" r:id="rId8"/>
-    <p:sldId id="427" r:id="rId9"/>
+    <p:sldId id="435" r:id="rId8"/>
+    <p:sldId id="415" r:id="rId9"/>
+    <p:sldId id="427" r:id="rId10"/>
   </p:sldIdLst>
   <p:sldSz cx="18288000" cy="10287000"/>
   <p:notesSz cx="6858000" cy="9144000"/>
   <p:embeddedFontLst>
     <p:embeddedFont>
       <p:font typeface="Consolas" panose="020B0609020204030204" pitchFamily="49" charset="0"/>
-      <p:regular r:id="rId11"/>
-      <p:bold r:id="rId12"/>
-      <p:italic r:id="rId13"/>
-      <p:boldItalic r:id="rId14"/>
+      <p:regular r:id="rId12"/>
+      <p:bold r:id="rId13"/>
+      <p:italic r:id="rId14"/>
+      <p:boldItalic r:id="rId15"/>
     </p:embeddedFont>
   </p:embeddedFontLst>
   <p:defaultTextStyle>
@@ -242,7 +243,7 @@
           <a:p>
             <a:fld id="{17A98A70-FA8C-4354-959C-C70678AC9BCF}" type="datetimeFigureOut">
               <a:rPr lang="en-US" smtClean="0"/>
-              <a:t>1/21/2025</a:t>
+              <a:t>4/29/2025</a:t>
             </a:fld>
             <a:endParaRPr lang="en-US"/>
           </a:p>
@@ -857,6 +858,138 @@
 </p:notes>
 </file>
 
+<file path=ppt/notesSlides/notesSlide4.xml><?xml version="1.0" encoding="utf-8"?>
+<p:notes xmlns:a="http://schemas.openxmlformats.org/drawingml/2006/main" xmlns:r="http://schemas.openxmlformats.org/officeDocument/2006/relationships" xmlns:p="http://schemas.openxmlformats.org/presentationml/2006/main">
+  <p:cSld>
+    <p:spTree>
+      <p:nvGrpSpPr>
+        <p:cNvPr id="1" name="">
+          <a:extLst>
+            <a:ext uri="{FF2B5EF4-FFF2-40B4-BE49-F238E27FC236}">
+              <a16:creationId xmlns:a16="http://schemas.microsoft.com/office/drawing/2014/main" id="{DB2948FC-8E31-57A5-1572-2BD51435BB38}"/>
+            </a:ext>
+          </a:extLst>
+        </p:cNvPr>
+        <p:cNvGrpSpPr/>
+        <p:nvPr/>
+      </p:nvGrpSpPr>
+      <p:grpSpPr>
+        <a:xfrm>
+          <a:off x="0" y="0"/>
+          <a:ext cx="0" cy="0"/>
+          <a:chOff x="0" y="0"/>
+          <a:chExt cx="0" cy="0"/>
+        </a:xfrm>
+      </p:grpSpPr>
+      <p:sp>
+        <p:nvSpPr>
+          <p:cNvPr id="2" name="Slide Image Placeholder 1">
+            <a:extLst>
+              <a:ext uri="{FF2B5EF4-FFF2-40B4-BE49-F238E27FC236}">
+                <a16:creationId xmlns:a16="http://schemas.microsoft.com/office/drawing/2014/main" id="{AC5FBA2C-8C25-ED84-25F8-72C4EE97404D}"/>
+              </a:ext>
+            </a:extLst>
+          </p:cNvPr>
+          <p:cNvSpPr>
+            <a:spLocks noGrp="1" noRot="1" noChangeAspect="1"/>
+          </p:cNvSpPr>
+          <p:nvPr>
+            <p:ph type="sldImg"/>
+          </p:nvPr>
+        </p:nvSpPr>
+        <p:spPr/>
+      </p:sp>
+      <p:sp>
+        <p:nvSpPr>
+          <p:cNvPr id="3" name="Notes Placeholder 2">
+            <a:extLst>
+              <a:ext uri="{FF2B5EF4-FFF2-40B4-BE49-F238E27FC236}">
+                <a16:creationId xmlns:a16="http://schemas.microsoft.com/office/drawing/2014/main" id="{CE27E3F8-F267-4C16-DA32-D9FBC5B291D6}"/>
+              </a:ext>
+            </a:extLst>
+          </p:cNvPr>
+          <p:cNvSpPr>
+            <a:spLocks noGrp="1"/>
+          </p:cNvSpPr>
+          <p:nvPr>
+            <p:ph type="body" idx="1"/>
+          </p:nvPr>
+        </p:nvSpPr>
+        <p:spPr/>
+        <p:txBody>
+          <a:bodyPr/>
+          <a:lstStyle/>
+          <a:p>
+            <a:pPr marL="228600" indent="-228600">
+              <a:buAutoNum type="arabicPeriod"/>
+            </a:pPr>
+            <a:r>
+              <a:rPr lang="en-US" dirty="0"/>
+              <a:t>False!</a:t>
+            </a:r>
+          </a:p>
+          <a:p>
+            <a:pPr marL="228600" indent="-228600">
+              <a:buAutoNum type="arabicPeriod"/>
+            </a:pPr>
+            <a:r>
+              <a:rPr lang="en-US" dirty="0"/>
+              <a:t>Function, Formula, Function</a:t>
+            </a:r>
+          </a:p>
+          <a:p>
+            <a:pPr marL="228600" indent="-228600">
+              <a:buAutoNum type="arabicPeriod"/>
+            </a:pPr>
+            <a:r>
+              <a:rPr lang="en-US" dirty="0"/>
+              <a:t>Argument</a:t>
+            </a:r>
+          </a:p>
+        </p:txBody>
+      </p:sp>
+      <p:sp>
+        <p:nvSpPr>
+          <p:cNvPr id="4" name="Slide Number Placeholder 3">
+            <a:extLst>
+              <a:ext uri="{FF2B5EF4-FFF2-40B4-BE49-F238E27FC236}">
+                <a16:creationId xmlns:a16="http://schemas.microsoft.com/office/drawing/2014/main" id="{85117B97-59E7-F89F-5A8E-93001789EA4D}"/>
+              </a:ext>
+            </a:extLst>
+          </p:cNvPr>
+          <p:cNvSpPr>
+            <a:spLocks noGrp="1"/>
+          </p:cNvSpPr>
+          <p:nvPr>
+            <p:ph type="sldNum" sz="quarter" idx="5"/>
+          </p:nvPr>
+        </p:nvSpPr>
+        <p:spPr/>
+        <p:txBody>
+          <a:bodyPr/>
+          <a:lstStyle/>
+          <a:p>
+            <a:fld id="{1300335D-9F13-4B80-ADC5-B0EA3E10FF6B}" type="slidenum">
+              <a:rPr lang="en-US" smtClean="0"/>
+              <a:t>7</a:t>
+            </a:fld>
+            <a:endParaRPr lang="en-US"/>
+          </a:p>
+        </p:txBody>
+      </p:sp>
+    </p:spTree>
+    <p:extLst>
+      <p:ext uri="{BB962C8B-B14F-4D97-AF65-F5344CB8AC3E}">
+        <p14:creationId xmlns:p14="http://schemas.microsoft.com/office/powerpoint/2010/main" val="4089629466"/>
+      </p:ext>
+    </p:extLst>
+  </p:cSld>
+  <p:clrMapOvr>
+    <a:masterClrMapping/>
+  </p:clrMapOvr>
+</p:notes>
+</file>
+
 <file path=ppt/slideLayouts/slideLayout1.xml><?xml version="1.0" encoding="utf-8"?>
 <p:sldLayout xmlns:a="http://schemas.openxmlformats.org/drawingml/2006/main" xmlns:r="http://schemas.openxmlformats.org/officeDocument/2006/relationships" xmlns:p="http://schemas.openxmlformats.org/presentationml/2006/main" type="title" preserve="1">
   <p:cSld name="Title Slide">
@@ -1037,7 +1170,7 @@
             <a:fld id="{1D8BD707-D9CF-40AE-B4C6-C98DA3205C09}" type="datetimeFigureOut">
               <a:rPr lang="en-US" smtClean="0"/>
               <a:pPr/>
-              <a:t>1/21/2025</a:t>
+              <a:t>4/29/2025</a:t>
             </a:fld>
             <a:endParaRPr lang="en-US"/>
           </a:p>
@@ -1202,7 +1335,7 @@
             <a:fld id="{1D8BD707-D9CF-40AE-B4C6-C98DA3205C09}" type="datetimeFigureOut">
               <a:rPr lang="en-US" smtClean="0"/>
               <a:pPr/>
-              <a:t>1/21/2025</a:t>
+              <a:t>4/29/2025</a:t>
             </a:fld>
             <a:endParaRPr lang="en-US"/>
           </a:p>
@@ -1377,7 +1510,7 @@
             <a:fld id="{1D8BD707-D9CF-40AE-B4C6-C98DA3205C09}" type="datetimeFigureOut">
               <a:rPr lang="en-US" smtClean="0"/>
               <a:pPr/>
-              <a:t>1/21/2025</a:t>
+              <a:t>4/29/2025</a:t>
             </a:fld>
             <a:endParaRPr lang="en-US"/>
           </a:p>
@@ -1542,7 +1675,7 @@
             <a:fld id="{1D8BD707-D9CF-40AE-B4C6-C98DA3205C09}" type="datetimeFigureOut">
               <a:rPr lang="en-US" smtClean="0"/>
               <a:pPr/>
-              <a:t>1/21/2025</a:t>
+              <a:t>4/29/2025</a:t>
             </a:fld>
             <a:endParaRPr lang="en-US"/>
           </a:p>
@@ -1784,7 +1917,7 @@
             <a:fld id="{1D8BD707-D9CF-40AE-B4C6-C98DA3205C09}" type="datetimeFigureOut">
               <a:rPr lang="en-US" smtClean="0"/>
               <a:pPr/>
-              <a:t>1/21/2025</a:t>
+              <a:t>4/29/2025</a:t>
             </a:fld>
             <a:endParaRPr lang="en-US"/>
           </a:p>
@@ -2066,7 +2199,7 @@
             <a:fld id="{1D8BD707-D9CF-40AE-B4C6-C98DA3205C09}" type="datetimeFigureOut">
               <a:rPr lang="en-US" smtClean="0"/>
               <a:pPr/>
-              <a:t>1/21/2025</a:t>
+              <a:t>4/29/2025</a:t>
             </a:fld>
             <a:endParaRPr lang="en-US"/>
           </a:p>
@@ -2482,7 +2615,7 @@
             <a:fld id="{1D8BD707-D9CF-40AE-B4C6-C98DA3205C09}" type="datetimeFigureOut">
               <a:rPr lang="en-US" smtClean="0"/>
               <a:pPr/>
-              <a:t>1/21/2025</a:t>
+              <a:t>4/29/2025</a:t>
             </a:fld>
             <a:endParaRPr lang="en-US"/>
           </a:p>
@@ -2596,7 +2729,7 @@
             <a:fld id="{1D8BD707-D9CF-40AE-B4C6-C98DA3205C09}" type="datetimeFigureOut">
               <a:rPr lang="en-US" smtClean="0"/>
               <a:pPr/>
-              <a:t>1/21/2025</a:t>
+              <a:t>4/29/2025</a:t>
             </a:fld>
             <a:endParaRPr lang="en-US"/>
           </a:p>
@@ -2688,7 +2821,7 @@
             <a:fld id="{1D8BD707-D9CF-40AE-B4C6-C98DA3205C09}" type="datetimeFigureOut">
               <a:rPr lang="en-US" smtClean="0"/>
               <a:pPr/>
-              <a:t>1/21/2025</a:t>
+              <a:t>4/29/2025</a:t>
             </a:fld>
             <a:endParaRPr lang="en-US"/>
           </a:p>
@@ -2960,7 +3093,7 @@
             <a:fld id="{1D8BD707-D9CF-40AE-B4C6-C98DA3205C09}" type="datetimeFigureOut">
               <a:rPr lang="en-US" smtClean="0"/>
               <a:pPr/>
-              <a:t>1/21/2025</a:t>
+              <a:t>4/29/2025</a:t>
             </a:fld>
             <a:endParaRPr lang="en-US"/>
           </a:p>
@@ -3209,7 +3342,7 @@
             <a:fld id="{1D8BD707-D9CF-40AE-B4C6-C98DA3205C09}" type="datetimeFigureOut">
               <a:rPr lang="en-US" smtClean="0"/>
               <a:pPr/>
-              <a:t>1/21/2025</a:t>
+              <a:t>4/29/2025</a:t>
             </a:fld>
             <a:endParaRPr lang="en-US"/>
           </a:p>
@@ -3422,7 +3555,7 @@
             <a:fld id="{1D8BD707-D9CF-40AE-B4C6-C98DA3205C09}" type="datetimeFigureOut">
               <a:rPr lang="en-US" smtClean="0"/>
               <a:pPr/>
-              <a:t>1/21/2025</a:t>
+              <a:t>4/29/2025</a:t>
             </a:fld>
             <a:endParaRPr lang="en-US"/>
           </a:p>
@@ -5259,6 +5392,254 @@
   <p:cSld>
     <p:spTree>
       <p:nvGrpSpPr>
+        <p:cNvPr id="1" name="">
+          <a:extLst>
+            <a:ext uri="{FF2B5EF4-FFF2-40B4-BE49-F238E27FC236}">
+              <a16:creationId xmlns:a16="http://schemas.microsoft.com/office/drawing/2014/main" id="{F4C0A7D7-7C73-6748-ED7C-823D116B8853}"/>
+            </a:ext>
+          </a:extLst>
+        </p:cNvPr>
+        <p:cNvGrpSpPr/>
+        <p:nvPr/>
+      </p:nvGrpSpPr>
+      <p:grpSpPr>
+        <a:xfrm>
+          <a:off x="0" y="0"/>
+          <a:ext cx="0" cy="0"/>
+          <a:chOff x="0" y="0"/>
+          <a:chExt cx="0" cy="0"/>
+        </a:xfrm>
+      </p:grpSpPr>
+      <p:sp>
+        <p:nvSpPr>
+          <p:cNvPr id="4" name="Rectangle 3">
+            <a:extLst>
+              <a:ext uri="{FF2B5EF4-FFF2-40B4-BE49-F238E27FC236}">
+                <a16:creationId xmlns:a16="http://schemas.microsoft.com/office/drawing/2014/main" id="{9FF099B0-C241-9D8F-6F66-8DF3A6C8C78C}"/>
+              </a:ext>
+            </a:extLst>
+          </p:cNvPr>
+          <p:cNvSpPr/>
+          <p:nvPr/>
+        </p:nvSpPr>
+        <p:spPr>
+          <a:xfrm>
+            <a:off x="9861630" y="0"/>
+            <a:ext cx="8426370" cy="10287000"/>
+          </a:xfrm>
+          <a:prstGeom prst="rect">
+            <a:avLst/>
+          </a:prstGeom>
+          <a:solidFill>
+            <a:srgbClr val="CF3338"/>
+          </a:solidFill>
+          <a:ln>
+            <a:noFill/>
+          </a:ln>
+        </p:spPr>
+        <p:style>
+          <a:lnRef idx="2">
+            <a:schemeClr val="accent1">
+              <a:shade val="50000"/>
+            </a:schemeClr>
+          </a:lnRef>
+          <a:fillRef idx="1">
+            <a:schemeClr val="accent1"/>
+          </a:fillRef>
+          <a:effectRef idx="0">
+            <a:schemeClr val="accent1"/>
+          </a:effectRef>
+          <a:fontRef idx="minor">
+            <a:schemeClr val="lt1"/>
+          </a:fontRef>
+        </p:style>
+        <p:txBody>
+          <a:bodyPr rtlCol="0" anchor="ctr"/>
+          <a:lstStyle/>
+          <a:p>
+            <a:pPr algn="ctr"/>
+            <a:endParaRPr lang="en-US" sz="2700"/>
+          </a:p>
+        </p:txBody>
+      </p:sp>
+      <p:pic>
+        <p:nvPicPr>
+          <p:cNvPr id="2" name="Picture 1">
+            <a:extLst>
+              <a:ext uri="{FF2B5EF4-FFF2-40B4-BE49-F238E27FC236}">
+                <a16:creationId xmlns:a16="http://schemas.microsoft.com/office/drawing/2014/main" id="{37009866-9C2D-166E-C0AF-AFB64B0A7C55}"/>
+              </a:ext>
+            </a:extLst>
+          </p:cNvPr>
+          <p:cNvPicPr>
+            <a:picLocks noChangeAspect="1"/>
+          </p:cNvPicPr>
+          <p:nvPr/>
+        </p:nvPicPr>
+        <p:blipFill rotWithShape="1">
+          <a:blip r:embed="rId3">
+            <a:extLst>
+              <a:ext uri="{28A0092B-C50C-407E-A947-70E740481C1C}">
+                <a14:useLocalDpi xmlns:a14="http://schemas.microsoft.com/office/drawing/2010/main" val="0"/>
+              </a:ext>
+            </a:extLst>
+          </a:blip>
+          <a:srcRect l="69227" t="33418" r="20112" b="50548"/>
+          <a:stretch/>
+        </p:blipFill>
+        <p:spPr>
+          <a:xfrm>
+            <a:off x="15579524" y="7544693"/>
+            <a:ext cx="2708477" cy="2987579"/>
+          </a:xfrm>
+          <a:prstGeom prst="rect">
+            <a:avLst/>
+          </a:prstGeom>
+        </p:spPr>
+      </p:pic>
+      <p:sp>
+        <p:nvSpPr>
+          <p:cNvPr id="3" name="TextBox 2">
+            <a:extLst>
+              <a:ext uri="{FF2B5EF4-FFF2-40B4-BE49-F238E27FC236}">
+                <a16:creationId xmlns:a16="http://schemas.microsoft.com/office/drawing/2014/main" id="{66D3EED5-4019-81EE-EB75-DDA5FF2D412E}"/>
+              </a:ext>
+            </a:extLst>
+          </p:cNvPr>
+          <p:cNvSpPr txBox="1"/>
+          <p:nvPr/>
+        </p:nvSpPr>
+        <p:spPr>
+          <a:xfrm>
+            <a:off x="260431" y="329879"/>
+            <a:ext cx="8906720" cy="4528034"/>
+          </a:xfrm>
+          <a:prstGeom prst="rect">
+            <a:avLst/>
+          </a:prstGeom>
+          <a:noFill/>
+        </p:spPr>
+        <p:txBody>
+          <a:bodyPr wrap="square" rtlCol="0">
+            <a:spAutoFit/>
+          </a:bodyPr>
+          <a:lstStyle/>
+          <a:p>
+            <a:r>
+              <a:rPr lang="en-US" sz="6000" b="1" dirty="0">
+                <a:solidFill>
+                  <a:srgbClr val="CF3338"/>
+                </a:solidFill>
+                <a:latin typeface="Pragmatica" panose="020B0403040502020204" pitchFamily="34" charset="0"/>
+              </a:rPr>
+              <a:t>Creating a Power App with images</a:t>
+            </a:r>
+          </a:p>
+          <a:p>
+            <a:endParaRPr lang="en-US" sz="6000" dirty="0">
+              <a:solidFill>
+                <a:srgbClr val="CF3338"/>
+              </a:solidFill>
+              <a:latin typeface="Pragmatica" panose="020B0403040502020204" pitchFamily="34" charset="0"/>
+            </a:endParaRPr>
+          </a:p>
+          <a:p>
+            <a:pPr marL="342900" marR="0" lvl="0" indent="-342900">
+              <a:lnSpc>
+                <a:spcPct val="115000"/>
+              </a:lnSpc>
+              <a:spcBef>
+                <a:spcPts val="0"/>
+              </a:spcBef>
+              <a:spcAft>
+                <a:spcPts val="0"/>
+              </a:spcAft>
+              <a:buFont typeface="+mj-lt"/>
+              <a:buAutoNum type="arabicPeriod"/>
+            </a:pPr>
+            <a:r>
+              <a:rPr lang="en-US" sz="3200" kern="100" dirty="0">
+                <a:solidFill>
+                  <a:srgbClr val="CF3338"/>
+                </a:solidFill>
+                <a:effectLst/>
+                <a:latin typeface="Pragmatica" panose="020B0403040502020204"/>
+                <a:ea typeface="Aptos" panose="020B0004020202020204" pitchFamily="34" charset="0"/>
+                <a:cs typeface="Times New Roman" panose="02020603050405020304" pitchFamily="18" charset="0"/>
+              </a:rPr>
+              <a:t>File: power-apps-challenge.xlsx</a:t>
+            </a:r>
+          </a:p>
+          <a:p>
+            <a:pPr marL="342900" marR="0" lvl="0" indent="-342900">
+              <a:lnSpc>
+                <a:spcPct val="115000"/>
+              </a:lnSpc>
+              <a:spcBef>
+                <a:spcPts val="0"/>
+              </a:spcBef>
+              <a:spcAft>
+                <a:spcPts val="0"/>
+              </a:spcAft>
+              <a:buFont typeface="+mj-lt"/>
+              <a:buAutoNum type="arabicPeriod"/>
+            </a:pPr>
+            <a:r>
+              <a:rPr lang="en-US" sz="3200" kern="100" dirty="0">
+                <a:solidFill>
+                  <a:srgbClr val="CF3338"/>
+                </a:solidFill>
+                <a:latin typeface="Pragmatica" panose="020B0403040502020204"/>
+                <a:cs typeface="Times New Roman" panose="02020603050405020304" pitchFamily="18" charset="0"/>
+              </a:rPr>
+              <a:t>Turn this into an app with photos!</a:t>
+            </a:r>
+          </a:p>
+          <a:p>
+            <a:pPr marL="342900" marR="0" lvl="0" indent="-342900">
+              <a:lnSpc>
+                <a:spcPct val="115000"/>
+              </a:lnSpc>
+              <a:spcBef>
+                <a:spcPts val="0"/>
+              </a:spcBef>
+              <a:spcAft>
+                <a:spcPts val="0"/>
+              </a:spcAft>
+              <a:buFont typeface="+mj-lt"/>
+              <a:buAutoNum type="arabicPeriod"/>
+            </a:pPr>
+            <a:r>
+              <a:rPr lang="en-US" sz="3200" kern="100" dirty="0">
+                <a:solidFill>
+                  <a:srgbClr val="CF3338"/>
+                </a:solidFill>
+                <a:latin typeface="Pragmatica" panose="020B0403040502020204"/>
+                <a:cs typeface="Times New Roman" panose="02020603050405020304" pitchFamily="18" charset="0"/>
+              </a:rPr>
+              <a:t>Use image URLs to populate values</a:t>
+            </a:r>
+          </a:p>
+        </p:txBody>
+      </p:sp>
+    </p:spTree>
+    <p:extLst>
+      <p:ext uri="{BB962C8B-B14F-4D97-AF65-F5344CB8AC3E}">
+        <p14:creationId xmlns:p14="http://schemas.microsoft.com/office/powerpoint/2010/main" val="2789196719"/>
+      </p:ext>
+    </p:extLst>
+  </p:cSld>
+  <p:clrMapOvr>
+    <a:masterClrMapping/>
+  </p:clrMapOvr>
+</p:sld>
+</file>
+
+<file path=ppt/slides/slide8.xml><?xml version="1.0" encoding="utf-8"?>
+<p:sld xmlns:a="http://schemas.openxmlformats.org/drawingml/2006/main" xmlns:r="http://schemas.openxmlformats.org/officeDocument/2006/relationships" xmlns:p="http://schemas.openxmlformats.org/presentationml/2006/main">
+  <p:cSld>
+    <p:spTree>
+      <p:nvGrpSpPr>
         <p:cNvPr id="1" name=""/>
         <p:cNvGrpSpPr/>
         <p:nvPr/>
@@ -5412,7 +5793,7 @@
 </p:sld>
 </file>
 
-<file path=ppt/slides/slide8.xml><?xml version="1.0" encoding="utf-8"?>
+<file path=ppt/slides/slide9.xml><?xml version="1.0" encoding="utf-8"?>
 <p:sld xmlns:a="http://schemas.openxmlformats.org/drawingml/2006/main" xmlns:r="http://schemas.openxmlformats.org/officeDocument/2006/relationships" xmlns:p="http://schemas.openxmlformats.org/presentationml/2006/main">
   <p:cSld>
     <p:spTree>

--- a/first-steps-power-apps.pptx
+++ b/first-steps-power-apps.pptx
@@ -5,28 +5,29 @@
     <p:sldMasterId id="2147483648" r:id="rId1"/>
   </p:sldMasterIdLst>
   <p:notesMasterIdLst>
-    <p:notesMasterId r:id="rId11"/>
+    <p:notesMasterId r:id="rId12"/>
   </p:notesMasterIdLst>
   <p:sldIdLst>
     <p:sldId id="256" r:id="rId2"/>
-    <p:sldId id="425" r:id="rId3"/>
+    <p:sldId id="436" r:id="rId3"/>
     <p:sldId id="426" r:id="rId4"/>
     <p:sldId id="407" r:id="rId5"/>
     <p:sldId id="428" r:id="rId6"/>
     <p:sldId id="434" r:id="rId7"/>
     <p:sldId id="435" r:id="rId8"/>
     <p:sldId id="415" r:id="rId9"/>
-    <p:sldId id="427" r:id="rId10"/>
+    <p:sldId id="437" r:id="rId10"/>
+    <p:sldId id="427" r:id="rId11"/>
   </p:sldIdLst>
   <p:sldSz cx="18288000" cy="10287000"/>
   <p:notesSz cx="6858000" cy="9144000"/>
   <p:embeddedFontLst>
     <p:embeddedFont>
       <p:font typeface="Consolas" panose="020B0609020204030204" pitchFamily="49" charset="0"/>
-      <p:regular r:id="rId12"/>
-      <p:bold r:id="rId13"/>
-      <p:italic r:id="rId14"/>
-      <p:boldItalic r:id="rId15"/>
+      <p:regular r:id="rId13"/>
+      <p:bold r:id="rId14"/>
+      <p:italic r:id="rId15"/>
+      <p:boldItalic r:id="rId16"/>
     </p:embeddedFont>
   </p:embeddedFontLst>
   <p:defaultTextStyle>
@@ -243,7 +244,7 @@
           <a:p>
             <a:fld id="{17A98A70-FA8C-4354-959C-C70678AC9BCF}" type="datetimeFigureOut">
               <a:rPr lang="en-US" smtClean="0"/>
-              <a:t>4/29/2025</a:t>
+              <a:t>4/2/2026</a:t>
             </a:fld>
             <a:endParaRPr lang="en-US"/>
           </a:p>
@@ -1170,7 +1171,7 @@
             <a:fld id="{1D8BD707-D9CF-40AE-B4C6-C98DA3205C09}" type="datetimeFigureOut">
               <a:rPr lang="en-US" smtClean="0"/>
               <a:pPr/>
-              <a:t>4/29/2025</a:t>
+              <a:t>4/2/2026</a:t>
             </a:fld>
             <a:endParaRPr lang="en-US"/>
           </a:p>
@@ -1335,7 +1336,7 @@
             <a:fld id="{1D8BD707-D9CF-40AE-B4C6-C98DA3205C09}" type="datetimeFigureOut">
               <a:rPr lang="en-US" smtClean="0"/>
               <a:pPr/>
-              <a:t>4/29/2025</a:t>
+              <a:t>4/2/2026</a:t>
             </a:fld>
             <a:endParaRPr lang="en-US"/>
           </a:p>
@@ -1510,7 +1511,7 @@
             <a:fld id="{1D8BD707-D9CF-40AE-B4C6-C98DA3205C09}" type="datetimeFigureOut">
               <a:rPr lang="en-US" smtClean="0"/>
               <a:pPr/>
-              <a:t>4/29/2025</a:t>
+              <a:t>4/2/2026</a:t>
             </a:fld>
             <a:endParaRPr lang="en-US"/>
           </a:p>
@@ -1675,7 +1676,7 @@
             <a:fld id="{1D8BD707-D9CF-40AE-B4C6-C98DA3205C09}" type="datetimeFigureOut">
               <a:rPr lang="en-US" smtClean="0"/>
               <a:pPr/>
-              <a:t>4/29/2025</a:t>
+              <a:t>4/2/2026</a:t>
             </a:fld>
             <a:endParaRPr lang="en-US"/>
           </a:p>
@@ -1917,7 +1918,7 @@
             <a:fld id="{1D8BD707-D9CF-40AE-B4C6-C98DA3205C09}" type="datetimeFigureOut">
               <a:rPr lang="en-US" smtClean="0"/>
               <a:pPr/>
-              <a:t>4/29/2025</a:t>
+              <a:t>4/2/2026</a:t>
             </a:fld>
             <a:endParaRPr lang="en-US"/>
           </a:p>
@@ -2199,7 +2200,7 @@
             <a:fld id="{1D8BD707-D9CF-40AE-B4C6-C98DA3205C09}" type="datetimeFigureOut">
               <a:rPr lang="en-US" smtClean="0"/>
               <a:pPr/>
-              <a:t>4/29/2025</a:t>
+              <a:t>4/2/2026</a:t>
             </a:fld>
             <a:endParaRPr lang="en-US"/>
           </a:p>
@@ -2615,7 +2616,7 @@
             <a:fld id="{1D8BD707-D9CF-40AE-B4C6-C98DA3205C09}" type="datetimeFigureOut">
               <a:rPr lang="en-US" smtClean="0"/>
               <a:pPr/>
-              <a:t>4/29/2025</a:t>
+              <a:t>4/2/2026</a:t>
             </a:fld>
             <a:endParaRPr lang="en-US"/>
           </a:p>
@@ -2729,7 +2730,7 @@
             <a:fld id="{1D8BD707-D9CF-40AE-B4C6-C98DA3205C09}" type="datetimeFigureOut">
               <a:rPr lang="en-US" smtClean="0"/>
               <a:pPr/>
-              <a:t>4/29/2025</a:t>
+              <a:t>4/2/2026</a:t>
             </a:fld>
             <a:endParaRPr lang="en-US"/>
           </a:p>
@@ -2821,7 +2822,7 @@
             <a:fld id="{1D8BD707-D9CF-40AE-B4C6-C98DA3205C09}" type="datetimeFigureOut">
               <a:rPr lang="en-US" smtClean="0"/>
               <a:pPr/>
-              <a:t>4/29/2025</a:t>
+              <a:t>4/2/2026</a:t>
             </a:fld>
             <a:endParaRPr lang="en-US"/>
           </a:p>
@@ -3093,7 +3094,7 @@
             <a:fld id="{1D8BD707-D9CF-40AE-B4C6-C98DA3205C09}" type="datetimeFigureOut">
               <a:rPr lang="en-US" smtClean="0"/>
               <a:pPr/>
-              <a:t>4/29/2025</a:t>
+              <a:t>4/2/2026</a:t>
             </a:fld>
             <a:endParaRPr lang="en-US"/>
           </a:p>
@@ -3342,7 +3343,7 @@
             <a:fld id="{1D8BD707-D9CF-40AE-B4C6-C98DA3205C09}" type="datetimeFigureOut">
               <a:rPr lang="en-US" smtClean="0"/>
               <a:pPr/>
-              <a:t>4/29/2025</a:t>
+              <a:t>4/2/2026</a:t>
             </a:fld>
             <a:endParaRPr lang="en-US"/>
           </a:p>
@@ -3555,7 +3556,7 @@
             <a:fld id="{1D8BD707-D9CF-40AE-B4C6-C98DA3205C09}" type="datetimeFigureOut">
               <a:rPr lang="en-US" smtClean="0"/>
               <a:pPr/>
-              <a:t>4/29/2025</a:t>
+              <a:t>4/2/2026</a:t>
             </a:fld>
             <a:endParaRPr lang="en-US"/>
           </a:p>
@@ -4077,12 +4078,18 @@
 </p:sld>
 </file>
 
-<file path=ppt/slides/slide2.xml><?xml version="1.0" encoding="utf-8"?>
+<file path=ppt/slides/slide10.xml><?xml version="1.0" encoding="utf-8"?>
 <p:sld xmlns:a="http://schemas.openxmlformats.org/drawingml/2006/main" xmlns:r="http://schemas.openxmlformats.org/officeDocument/2006/relationships" xmlns:p="http://schemas.openxmlformats.org/presentationml/2006/main">
   <p:cSld>
     <p:spTree>
       <p:nvGrpSpPr>
-        <p:cNvPr id="1" name=""/>
+        <p:cNvPr id="1" name="">
+          <a:extLst>
+            <a:ext uri="{FF2B5EF4-FFF2-40B4-BE49-F238E27FC236}">
+              <a16:creationId xmlns:a16="http://schemas.microsoft.com/office/drawing/2014/main" id="{E85323C9-D5F7-C820-78B9-E169BDF2311C}"/>
+            </a:ext>
+          </a:extLst>
+        </p:cNvPr>
         <p:cNvGrpSpPr/>
         <p:nvPr/>
       </p:nvGrpSpPr>
@@ -4096,7 +4103,13 @@
       </p:grpSpPr>
       <p:sp>
         <p:nvSpPr>
-          <p:cNvPr id="4" name="Rectangle 3"/>
+          <p:cNvPr id="4" name="Rectangle 3">
+            <a:extLst>
+              <a:ext uri="{FF2B5EF4-FFF2-40B4-BE49-F238E27FC236}">
+                <a16:creationId xmlns:a16="http://schemas.microsoft.com/office/drawing/2014/main" id="{28971779-1F50-1702-DEC1-87CD482189F0}"/>
+              </a:ext>
+            </a:extLst>
+          </p:cNvPr>
           <p:cNvSpPr/>
           <p:nvPr/>
         </p:nvSpPr>
@@ -4142,7 +4155,13 @@
       </p:sp>
       <p:sp>
         <p:nvSpPr>
-          <p:cNvPr id="5" name="TextBox 4"/>
+          <p:cNvPr id="5" name="TextBox 4">
+            <a:extLst>
+              <a:ext uri="{FF2B5EF4-FFF2-40B4-BE49-F238E27FC236}">
+                <a16:creationId xmlns:a16="http://schemas.microsoft.com/office/drawing/2014/main" id="{5ECC4C7B-C529-5329-03AC-796804551DC1}"/>
+              </a:ext>
+            </a:extLst>
+          </p:cNvPr>
           <p:cNvSpPr txBox="1"/>
           <p:nvPr/>
         </p:nvSpPr>
@@ -4169,7 +4188,126 @@
                 </a:solidFill>
                 <a:latin typeface="Normafixed Tryout" panose="00000409000000000000" pitchFamily="49" charset="0"/>
               </a:rPr>
-              <a:t>Hi, I’m George</a:t>
+              <a:t>Thank you</a:t>
+            </a:r>
+          </a:p>
+        </p:txBody>
+      </p:sp>
+    </p:spTree>
+    <p:extLst>
+      <p:ext uri="{BB962C8B-B14F-4D97-AF65-F5344CB8AC3E}">
+        <p14:creationId xmlns:p14="http://schemas.microsoft.com/office/powerpoint/2010/main" val="657829062"/>
+      </p:ext>
+    </p:extLst>
+  </p:cSld>
+  <p:clrMapOvr>
+    <a:masterClrMapping/>
+  </p:clrMapOvr>
+</p:sld>
+</file>
+
+<file path=ppt/slides/slide2.xml><?xml version="1.0" encoding="utf-8"?>
+<p:sld xmlns:a="http://schemas.openxmlformats.org/drawingml/2006/main" xmlns:r="http://schemas.openxmlformats.org/officeDocument/2006/relationships" xmlns:p="http://schemas.openxmlformats.org/presentationml/2006/main">
+  <p:cSld>
+    <p:spTree>
+      <p:nvGrpSpPr>
+        <p:cNvPr id="1" name=""/>
+        <p:cNvGrpSpPr/>
+        <p:nvPr/>
+      </p:nvGrpSpPr>
+      <p:grpSpPr>
+        <a:xfrm>
+          <a:off x="0" y="0"/>
+          <a:ext cx="0" cy="0"/>
+          <a:chOff x="0" y="0"/>
+          <a:chExt cx="0" cy="0"/>
+        </a:xfrm>
+      </p:grpSpPr>
+      <p:sp>
+        <p:nvSpPr>
+          <p:cNvPr id="4" name="Rectangle 3"/>
+          <p:cNvSpPr/>
+          <p:nvPr/>
+        </p:nvSpPr>
+        <p:spPr>
+          <a:xfrm>
+            <a:off x="0" y="0"/>
+            <a:ext cx="18288000" cy="10287000"/>
+          </a:xfrm>
+          <a:prstGeom prst="rect">
+            <a:avLst/>
+          </a:prstGeom>
+          <a:solidFill>
+            <a:srgbClr val="CF3338"/>
+          </a:solidFill>
+          <a:ln>
+            <a:noFill/>
+          </a:ln>
+        </p:spPr>
+        <p:style>
+          <a:lnRef idx="2">
+            <a:schemeClr val="accent1">
+              <a:shade val="50000"/>
+            </a:schemeClr>
+          </a:lnRef>
+          <a:fillRef idx="1">
+            <a:schemeClr val="accent1"/>
+          </a:fillRef>
+          <a:effectRef idx="0">
+            <a:schemeClr val="accent1"/>
+          </a:effectRef>
+          <a:fontRef idx="minor">
+            <a:schemeClr val="lt1"/>
+          </a:fontRef>
+        </p:style>
+        <p:txBody>
+          <a:bodyPr rtlCol="0" anchor="ctr"/>
+          <a:lstStyle/>
+          <a:p>
+            <a:pPr algn="ctr"/>
+            <a:endParaRPr lang="en-US" sz="2700"/>
+          </a:p>
+        </p:txBody>
+      </p:sp>
+      <p:sp>
+        <p:nvSpPr>
+          <p:cNvPr id="5" name="TextBox 4"/>
+          <p:cNvSpPr txBox="1"/>
+          <p:nvPr/>
+        </p:nvSpPr>
+        <p:spPr>
+          <a:xfrm>
+            <a:off x="781292" y="590309"/>
+            <a:ext cx="15486926" cy="1446550"/>
+          </a:xfrm>
+          <a:prstGeom prst="rect">
+            <a:avLst/>
+          </a:prstGeom>
+          <a:noFill/>
+        </p:spPr>
+        <p:txBody>
+          <a:bodyPr wrap="square" rtlCol="0">
+            <a:spAutoFit/>
+          </a:bodyPr>
+          <a:lstStyle/>
+          <a:p>
+            <a:r>
+              <a:rPr lang="en-US" sz="4400" b="1" dirty="0">
+                <a:solidFill>
+                  <a:schemeClr val="bg1"/>
+                </a:solidFill>
+              </a:rPr>
+              <a:t>I help Excel users move from fragile spreadsheets</a:t>
+            </a:r>
+          </a:p>
+          <a:p>
+            <a:r>
+              <a:rPr lang="en-US" sz="4400" b="1" dirty="0">
+                <a:solidFill>
+                  <a:schemeClr val="bg1"/>
+                </a:solidFill>
+              </a:rPr>
+              <a:t>to confident, scalable analysis.</a:t>
             </a:r>
           </a:p>
         </p:txBody>
@@ -4270,7 +4408,7 @@
       </p:pic>
       <p:pic>
         <p:nvPicPr>
-          <p:cNvPr id="8" name="Picture 7" descr="Logo&#10;&#10;Description automatically generated">
+          <p:cNvPr id="8" name="Picture 7" descr="Logo  Description automatically generated">
             <a:extLst>
               <a:ext uri="{FF2B5EF4-FFF2-40B4-BE49-F238E27FC236}">
                 <a16:creationId xmlns:a16="http://schemas.microsoft.com/office/drawing/2014/main" id="{97E0F267-87DF-961E-1FAA-47FD4F27A5C6}"/>
@@ -4398,10 +4536,57 @@
           </a:extLst>
         </p:spPr>
       </p:pic>
+      <p:pic>
+        <p:nvPicPr>
+          <p:cNvPr id="2" name="Picture 2" descr="Thais Cooke on LinkedIn: #linkedinlearninginstructor #linkedinlearning | 82  comments">
+            <a:extLst>
+              <a:ext uri="{FF2B5EF4-FFF2-40B4-BE49-F238E27FC236}">
+                <a16:creationId xmlns:a16="http://schemas.microsoft.com/office/drawing/2014/main" id="{2E3C0D6C-F7C9-F3C4-3BAA-FF34E086E7E0}"/>
+              </a:ext>
+            </a:extLst>
+          </p:cNvPr>
+          <p:cNvPicPr>
+            <a:picLocks noChangeAspect="1" noChangeArrowheads="1"/>
+          </p:cNvPicPr>
+          <p:nvPr/>
+        </p:nvPicPr>
+        <p:blipFill>
+          <a:blip r:embed="rId7">
+            <a:extLst>
+              <a:ext uri="{28A0092B-C50C-407E-A947-70E740481C1C}">
+                <a14:useLocalDpi xmlns:a14="http://schemas.microsoft.com/office/drawing/2010/main" val="0"/>
+              </a:ext>
+            </a:extLst>
+          </a:blip>
+          <a:srcRect/>
+          <a:stretch>
+            <a:fillRect/>
+          </a:stretch>
+        </p:blipFill>
+        <p:spPr bwMode="auto">
+          <a:xfrm>
+            <a:off x="14478000" y="5312978"/>
+            <a:ext cx="3333750" cy="1371600"/>
+          </a:xfrm>
+          <a:prstGeom prst="rect">
+            <a:avLst/>
+          </a:prstGeom>
+          <a:noFill/>
+          <a:extLst>
+            <a:ext uri="{909E8E84-426E-40DD-AFC4-6F175D3DCCD1}">
+              <a14:hiddenFill xmlns:a14="http://schemas.microsoft.com/office/drawing/2010/main">
+                <a:solidFill>
+                  <a:srgbClr val="FFFFFF"/>
+                </a:solidFill>
+              </a14:hiddenFill>
+            </a:ext>
+          </a:extLst>
+        </p:spPr>
+      </p:pic>
     </p:spTree>
     <p:extLst>
       <p:ext uri="{BB962C8B-B14F-4D97-AF65-F5344CB8AC3E}">
-        <p14:creationId xmlns:p14="http://schemas.microsoft.com/office/powerpoint/2010/main" val="1872901171"/>
+        <p14:creationId xmlns:p14="http://schemas.microsoft.com/office/powerpoint/2010/main" val="3956024191"/>
       </p:ext>
     </p:extLst>
   </p:cSld>
@@ -5801,7 +5986,7 @@
         <p:cNvPr id="1" name="">
           <a:extLst>
             <a:ext uri="{FF2B5EF4-FFF2-40B4-BE49-F238E27FC236}">
-              <a16:creationId xmlns:a16="http://schemas.microsoft.com/office/drawing/2014/main" id="{E85323C9-D5F7-C820-78B9-E169BDF2311C}"/>
+              <a16:creationId xmlns:a16="http://schemas.microsoft.com/office/drawing/2014/main" id="{6DA3157F-6EBE-9C2B-27A0-9678E9F654ED}"/>
             </a:ext>
           </a:extLst>
         </p:cNvPr>
@@ -5818,62 +6003,10 @@
       </p:grpSpPr>
       <p:sp>
         <p:nvSpPr>
-          <p:cNvPr id="4" name="Rectangle 3">
+          <p:cNvPr id="11" name="TextBox 10">
             <a:extLst>
               <a:ext uri="{FF2B5EF4-FFF2-40B4-BE49-F238E27FC236}">
-                <a16:creationId xmlns:a16="http://schemas.microsoft.com/office/drawing/2014/main" id="{28971779-1F50-1702-DEC1-87CD482189F0}"/>
-              </a:ext>
-            </a:extLst>
-          </p:cNvPr>
-          <p:cNvSpPr/>
-          <p:nvPr/>
-        </p:nvSpPr>
-        <p:spPr>
-          <a:xfrm>
-            <a:off x="0" y="0"/>
-            <a:ext cx="18288000" cy="10287000"/>
-          </a:xfrm>
-          <a:prstGeom prst="rect">
-            <a:avLst/>
-          </a:prstGeom>
-          <a:solidFill>
-            <a:srgbClr val="CF3338"/>
-          </a:solidFill>
-          <a:ln>
-            <a:noFill/>
-          </a:ln>
-        </p:spPr>
-        <p:style>
-          <a:lnRef idx="2">
-            <a:schemeClr val="accent1">
-              <a:shade val="50000"/>
-            </a:schemeClr>
-          </a:lnRef>
-          <a:fillRef idx="1">
-            <a:schemeClr val="accent1"/>
-          </a:fillRef>
-          <a:effectRef idx="0">
-            <a:schemeClr val="accent1"/>
-          </a:effectRef>
-          <a:fontRef idx="minor">
-            <a:schemeClr val="lt1"/>
-          </a:fontRef>
-        </p:style>
-        <p:txBody>
-          <a:bodyPr rtlCol="0" anchor="ctr"/>
-          <a:lstStyle/>
-          <a:p>
-            <a:pPr algn="ctr"/>
-            <a:endParaRPr lang="en-US" sz="2700"/>
-          </a:p>
-        </p:txBody>
-      </p:sp>
-      <p:sp>
-        <p:nvSpPr>
-          <p:cNvPr id="5" name="TextBox 4">
-            <a:extLst>
-              <a:ext uri="{FF2B5EF4-FFF2-40B4-BE49-F238E27FC236}">
-                <a16:creationId xmlns:a16="http://schemas.microsoft.com/office/drawing/2014/main" id="{5ECC4C7B-C529-5329-03AC-796804551DC1}"/>
+                <a16:creationId xmlns:a16="http://schemas.microsoft.com/office/drawing/2014/main" id="{4110C409-BE3A-C40E-0EC2-5427EA5208F2}"/>
               </a:ext>
             </a:extLst>
           </p:cNvPr>
@@ -5882,8 +6015,8 @@
         </p:nvSpPr>
         <p:spPr>
           <a:xfrm>
-            <a:off x="781292" y="590309"/>
-            <a:ext cx="15486926" cy="1615827"/>
+            <a:off x="520861" y="170082"/>
+            <a:ext cx="11979797" cy="1477328"/>
           </a:xfrm>
           <a:prstGeom prst="rect">
             <a:avLst/>
@@ -5897,21 +6030,217 @@
           <a:lstStyle/>
           <a:p>
             <a:r>
-              <a:rPr lang="en-US" sz="9900" b="1" dirty="0">
+              <a:rPr lang="en-US" sz="9000" dirty="0">
+                <a:latin typeface="Aliens &amp; cows" panose="00000500000000000000" pitchFamily="2" charset="0"/>
+              </a:rPr>
+              <a:t>Post-session logistics</a:t>
+            </a:r>
+          </a:p>
+        </p:txBody>
+      </p:sp>
+      <p:sp>
+        <p:nvSpPr>
+          <p:cNvPr id="3" name="TextBox 2">
+            <a:extLst>
+              <a:ext uri="{FF2B5EF4-FFF2-40B4-BE49-F238E27FC236}">
+                <a16:creationId xmlns:a16="http://schemas.microsoft.com/office/drawing/2014/main" id="{E3DFDE40-FD16-A6BC-70CA-D3D86DEBE370}"/>
+              </a:ext>
+            </a:extLst>
+          </p:cNvPr>
+          <p:cNvSpPr txBox="1"/>
+          <p:nvPr/>
+        </p:nvSpPr>
+        <p:spPr>
+          <a:xfrm>
+            <a:off x="609600" y="1943100"/>
+            <a:ext cx="9525000" cy="6555641"/>
+          </a:xfrm>
+          <a:prstGeom prst="rect">
+            <a:avLst/>
+          </a:prstGeom>
+          <a:noFill/>
+        </p:spPr>
+        <p:txBody>
+          <a:bodyPr wrap="square" rtlCol="0">
+            <a:spAutoFit/>
+          </a:bodyPr>
+          <a:lstStyle/>
+          <a:p>
+            <a:pPr marL="685800" indent="-685800">
+              <a:buClr>
+                <a:srgbClr val="CF3338"/>
+              </a:buClr>
+              <a:buFont typeface="Arial" panose="020B0604020202020204" pitchFamily="34" charset="0"/>
+              <a:buChar char="•"/>
+            </a:pPr>
+            <a:r>
+              <a:rPr lang="en-US" sz="4200" dirty="0">
                 <a:solidFill>
-                  <a:schemeClr val="bg1"/>
+                  <a:srgbClr val="707070"/>
                 </a:solidFill>
-                <a:latin typeface="Normafixed Tryout" panose="00000409000000000000" pitchFamily="49" charset="0"/>
+                <a:latin typeface="Pragmatica" panose="020B0403040502020204" pitchFamily="34" charset="0"/>
               </a:rPr>
-              <a:t>Thank you</a:t>
-            </a:r>
-          </a:p>
-        </p:txBody>
-      </p:sp>
+              <a:t>Course downloads will remain up at </a:t>
+            </a:r>
+            <a:r>
+              <a:rPr lang="en-US" sz="4200" dirty="0">
+                <a:solidFill>
+                  <a:srgbClr val="707070"/>
+                </a:solidFill>
+                <a:latin typeface="Pragmatica" panose="020B0403040502020204" pitchFamily="34" charset="0"/>
+                <a:hlinkClick r:id="rId2"/>
+              </a:rPr>
+              <a:t>https://github.com/stringfestdata/first-steps-with-power-apps-for-excel-users/archive/refs/heads/main.zip</a:t>
+            </a:r>
+            <a:endParaRPr lang="en-US" sz="4200" dirty="0">
+              <a:solidFill>
+                <a:srgbClr val="707070"/>
+              </a:solidFill>
+              <a:latin typeface="Pragmatica" panose="020B0403040502020204" pitchFamily="34" charset="0"/>
+            </a:endParaRPr>
+          </a:p>
+          <a:p>
+            <a:pPr marL="685800" indent="-685800">
+              <a:buClr>
+                <a:srgbClr val="CF3338"/>
+              </a:buClr>
+              <a:buFont typeface="Arial" panose="020B0604020202020204" pitchFamily="34" charset="0"/>
+              <a:buChar char="•"/>
+            </a:pPr>
+            <a:r>
+              <a:rPr lang="en-US" sz="4200" dirty="0">
+                <a:solidFill>
+                  <a:srgbClr val="707070"/>
+                </a:solidFill>
+                <a:latin typeface="Pragmatica" panose="020B0403040502020204" pitchFamily="34" charset="0"/>
+              </a:rPr>
+              <a:t>Recording is available at </a:t>
+            </a:r>
+            <a:r>
+              <a:rPr lang="en-US" sz="4200" dirty="0">
+                <a:solidFill>
+                  <a:srgbClr val="707070"/>
+                </a:solidFill>
+                <a:latin typeface="Pragmatica" panose="020B0403040502020204" pitchFamily="34" charset="0"/>
+                <a:hlinkClick r:id="rId3"/>
+              </a:rPr>
+              <a:t>https://stringfestdata.gumroad.com/l/mxlais</a:t>
+            </a:r>
+            <a:endParaRPr lang="en-US" sz="4200" dirty="0">
+              <a:solidFill>
+                <a:srgbClr val="707070"/>
+              </a:solidFill>
+              <a:latin typeface="Pragmatica" panose="020B0403040502020204" pitchFamily="34" charset="0"/>
+            </a:endParaRPr>
+          </a:p>
+          <a:p>
+            <a:pPr marL="1600200" lvl="2" indent="-685800">
+              <a:buClr>
+                <a:srgbClr val="CF3338"/>
+              </a:buClr>
+              <a:buFont typeface="Arial" panose="020B0604020202020204" pitchFamily="34" charset="0"/>
+              <a:buChar char="•"/>
+            </a:pPr>
+            <a:r>
+              <a:rPr lang="en-US" sz="4200" dirty="0">
+                <a:solidFill>
+                  <a:srgbClr val="707070"/>
+                </a:solidFill>
+                <a:latin typeface="Pragmatica" panose="020B0403040502020204" pitchFamily="34" charset="0"/>
+              </a:rPr>
+              <a:t>Get first week free</a:t>
+            </a:r>
+          </a:p>
+          <a:p>
+            <a:pPr marL="1600200" lvl="2" indent="-685800">
+              <a:buClr>
+                <a:srgbClr val="CF3338"/>
+              </a:buClr>
+              <a:buFont typeface="Arial" panose="020B0604020202020204" pitchFamily="34" charset="0"/>
+              <a:buChar char="•"/>
+            </a:pPr>
+            <a:r>
+              <a:rPr lang="en-US" sz="4200" dirty="0">
+                <a:solidFill>
+                  <a:srgbClr val="707070"/>
+                </a:solidFill>
+                <a:latin typeface="Pragmatica" panose="020B0403040502020204" pitchFamily="34" charset="0"/>
+              </a:rPr>
+              <a:t>Join first month for $1 with code (email)</a:t>
+            </a:r>
+          </a:p>
+        </p:txBody>
+      </p:sp>
+      <p:pic>
+        <p:nvPicPr>
+          <p:cNvPr id="15" name="Picture 14" descr="A close up of a sign&#10;&#10;Description automatically generated">
+            <a:extLst>
+              <a:ext uri="{FF2B5EF4-FFF2-40B4-BE49-F238E27FC236}">
+                <a16:creationId xmlns:a16="http://schemas.microsoft.com/office/drawing/2014/main" id="{0F306F67-3E73-4B1D-AEA9-7056D9BF25B4}"/>
+              </a:ext>
+            </a:extLst>
+          </p:cNvPr>
+          <p:cNvPicPr>
+            <a:picLocks noChangeAspect="1"/>
+          </p:cNvPicPr>
+          <p:nvPr/>
+        </p:nvPicPr>
+        <p:blipFill>
+          <a:blip r:embed="rId4">
+            <a:extLst>
+              <a:ext uri="{28A0092B-C50C-407E-A947-70E740481C1C}">
+                <a14:useLocalDpi xmlns:a14="http://schemas.microsoft.com/office/drawing/2010/main" val="0"/>
+              </a:ext>
+            </a:extLst>
+          </a:blip>
+          <a:stretch>
+            <a:fillRect/>
+          </a:stretch>
+        </p:blipFill>
+        <p:spPr>
+          <a:xfrm>
+            <a:off x="16341036" y="8058429"/>
+            <a:ext cx="1942857" cy="2228571"/>
+          </a:xfrm>
+          <a:prstGeom prst="rect">
+            <a:avLst/>
+          </a:prstGeom>
+        </p:spPr>
+      </p:pic>
+      <p:pic>
+        <p:nvPicPr>
+          <p:cNvPr id="2" name="Picture 1" descr="The Modern Excel AI Stack&#10;&#10;AI-generated content may be incorrect.">
+            <a:extLst>
+              <a:ext uri="{FF2B5EF4-FFF2-40B4-BE49-F238E27FC236}">
+                <a16:creationId xmlns:a16="http://schemas.microsoft.com/office/drawing/2014/main" id="{36D6E364-A9EE-1DD1-00B7-81B1612AC24F}"/>
+              </a:ext>
+            </a:extLst>
+          </p:cNvPr>
+          <p:cNvPicPr>
+            <a:picLocks noChangeAspect="1"/>
+          </p:cNvPicPr>
+          <p:nvPr/>
+        </p:nvPicPr>
+        <p:blipFill>
+          <a:blip r:embed="rId5"/>
+          <a:stretch>
+            <a:fillRect/>
+          </a:stretch>
+        </p:blipFill>
+        <p:spPr>
+          <a:xfrm>
+            <a:off x="11267628" y="2476500"/>
+            <a:ext cx="6280354" cy="4191000"/>
+          </a:xfrm>
+          <a:prstGeom prst="rect">
+            <a:avLst/>
+          </a:prstGeom>
+        </p:spPr>
+      </p:pic>
     </p:spTree>
     <p:extLst>
       <p:ext uri="{BB962C8B-B14F-4D97-AF65-F5344CB8AC3E}">
-        <p14:creationId xmlns:p14="http://schemas.microsoft.com/office/powerpoint/2010/main" val="657829062"/>
+        <p14:creationId xmlns:p14="http://schemas.microsoft.com/office/powerpoint/2010/main" val="146508325"/>
       </p:ext>
     </p:extLst>
   </p:cSld>
